--- a/tools/board-reporting/sample-board-report.pptx
+++ b/tools/board-reporting/sample-board-report.pptx
@@ -1240,7 +1240,7 @@
                 <a:ea typeface="Calibri" pitchFamily="34" charset="-122"/>
                 <a:cs typeface="Calibri" pitchFamily="34" charset="-120"/>
               </a:rPr>
-              <a:t>Your Company  —  Board of Directors  —  Q3 2026</a:t>
+              <a:t>Your Company  |  Board of Directors  |  Q3 2026</a:t>
             </a:r>
             <a:endParaRPr lang="en-US" sz="1800" dirty="0"/>
           </a:p>
@@ -2148,7 +2148,7 @@
                 <a:ea typeface="Calibri" pitchFamily="34" charset="-122"/>
                 <a:cs typeface="Calibri" pitchFamily="34" charset="-120"/>
               </a:rPr>
-              <a:t>Approval requested for the platform reliability investment — see Decisions, slide 7.</a:t>
+              <a:t>Approval requested for the platform reliability investment; see Decisions, slide 7.</a:t>
             </a:r>
             <a:endParaRPr lang="en-US" sz="1200" dirty="0"/>
           </a:p>
@@ -2388,7 +2388,7 @@
                 <a:ea typeface="Calibri" pitchFamily="34" charset="-122"/>
                 <a:cs typeface="Calibri" pitchFamily="34" charset="-120"/>
               </a:rPr>
-              <a:t>What changed for the business, not what shipped internally.</a:t>
+              <a:t>What changed for the business, rather than what shipped internally.</a:t>
             </a:r>
             <a:endParaRPr lang="en-US" sz="1200" dirty="0"/>
           </a:p>
@@ -3828,7 +3828,7 @@
                 <a:ea typeface="Calibri" pitchFamily="34" charset="-122"/>
                 <a:cs typeface="Calibri" pitchFamily="34" charset="-120"/>
               </a:rPr>
-              <a:t>Customer support triage — routes and drafts first-response suggestions</a:t>
+              <a:t>Customer support triage: routes and drafts first-response suggestions</a:t>
             </a:r>
             <a:endParaRPr lang="en-US" sz="1150" dirty="0"/>
           </a:p>
@@ -3894,7 +3894,7 @@
                 <a:ea typeface="Calibri" pitchFamily="34" charset="-122"/>
                 <a:cs typeface="Calibri" pitchFamily="34" charset="-120"/>
               </a:rPr>
-              <a:t>Internal knowledge search — employee-facing, no customer data exposure</a:t>
+              <a:t>Internal knowledge search: employee-facing, no customer data exposure</a:t>
             </a:r>
             <a:endParaRPr lang="en-US" sz="1150" dirty="0"/>
           </a:p>
@@ -3960,7 +3960,7 @@
                 <a:ea typeface="Calibri" pitchFamily="34" charset="-122"/>
                 <a:cs typeface="Calibri" pitchFamily="34" charset="-120"/>
               </a:rPr>
-              <a:t>Code review assistant — engineering only, human approval required</a:t>
+              <a:t>Code review assistant: engineering only, human approval required</a:t>
             </a:r>
             <a:endParaRPr lang="en-US" sz="1150" dirty="0"/>
           </a:p>
@@ -6334,7 +6334,7 @@
                 <a:ea typeface="Calibri" pitchFamily="34" charset="-122"/>
                 <a:cs typeface="Calibri" pitchFamily="34" charset="-120"/>
               </a:rPr>
-              <a:t>#1 — Payment processor concentration, in business terms</a:t>
+              <a:t>#1: Payment processor concentration, in business terms</a:t>
             </a:r>
             <a:endParaRPr lang="en-US" sz="1450" dirty="0"/>
           </a:p>
